--- a/presentation/TaskCanvas_팀프로젝트_발표자료_14장.pptx
+++ b/presentation/TaskCanvas_팀프로젝트_발표자료_14장.pptx
@@ -917,7 +917,13 @@
           <a:p>
             <a:r>
               <a:rPr lang="ko-KR" dirty="0"/>
-              <a:t>결과는 2026-10-08 개발 PC 1대에서 확인한 것입니다.</a:t>
+              <a:t>수용 기준과 별도로 접속 출처 보안 점검과, 브라우저 네 개로 시연 순서를 그대로 돌리는 자동 리허설 12개 항목도 통과했습니다.</a:t>
+            </a:r>
+          </a:p>
+          <a:p>
+            <a:r>
+              <a:rPr lang="ko-KR" dirty="0"/>
+              <a:t>결과는 개발 PC 1대에서 확인한 것이라 LAN 구간은 들어 있지 않습니다.</a:t>
             </a:r>
           </a:p>
           <a:p>
@@ -1011,6 +1017,12 @@
             <a:r>
               <a:rPr lang="ko-KR" dirty="0"/>
               <a:t>가장 큰 위험은 학교 PC에서 Node.js 실행과 포트 접근이 막히는 것입니다.</a:t>
+            </a:r>
+          </a:p>
+          <a:p>
+            <a:r>
+              <a:rPr lang="ko-KR" dirty="0"/>
+              <a:t>첫날 서버 PC의 사전 점검 스크립트와 접속 PC의 접속 점검 화면으로 확인합니다.</a:t>
             </a:r>
           </a:p>
           <a:p>
@@ -9269,7 +9281,7 @@
                 <a:ea typeface="NanumSquare" pitchFamily="34" charset="-122"/>
                 <a:cs typeface="NanumSquare" pitchFamily="34" charset="-120"/>
               </a:rPr>
-              <a:t>검사 방법</a:t>
+              <a:t>추가 확인</a:t>
             </a:r>
             <a:endParaRPr lang="en-US" sz="1150" dirty="0"/>
           </a:p>
@@ -9308,7 +9320,7 @@
                 <a:ea typeface="NanumSquare" pitchFamily="34" charset="-122"/>
                 <a:cs typeface="NanumSquare" pitchFamily="34" charset="-120"/>
               </a:rPr>
-              <a:t>npm run test:acceptance</a:t>
+              <a:t>보안 점검 1 통과 · 접속 출처 제한</a:t>
             </a:r>
             <a:endParaRPr lang="en-US" sz="1050" dirty="0"/>
           </a:p>
@@ -9339,17 +9351,17 @@
               <a:buNone/>
             </a:pPr>
             <a:r>
-              <a:rPr lang="en-US" sz="1020" dirty="0">
-                <a:solidFill>
-                  <a:srgbClr val="AEBEDF"/>
-                </a:solidFill>
-                <a:latin typeface="NanumSquare" pitchFamily="34" charset="0"/>
-                <a:ea typeface="NanumSquare" pitchFamily="34" charset="-122"/>
-                <a:cs typeface="NanumSquare" pitchFamily="34" charset="-120"/>
-              </a:rPr>
-              <a:t>임시 PHP·실시간 서버를 띄워 자동 검사</a:t>
-            </a:r>
-            <a:endParaRPr lang="en-US" sz="1020" dirty="0"/>
+              <a:rPr lang="en-US" sz="1050" dirty="0">
+                <a:solidFill>
+                  <a:srgbClr val="F7F9FF"/>
+                </a:solidFill>
+                <a:latin typeface="NanumSquare" pitchFamily="34" charset="0"/>
+                <a:ea typeface="NanumSquare" pitchFamily="34" charset="-122"/>
+                <a:cs typeface="NanumSquare" pitchFamily="34" charset="-120"/>
+              </a:rPr>
+              <a:t>4인 자동 리허설 12 통과 · 브라우저 4개</a:t>
+            </a:r>
+            <a:endParaRPr lang="en-US" sz="1050" dirty="0"/>
           </a:p>
         </p:txBody>
       </p:sp>
@@ -9386,7 +9398,7 @@
                 <a:ea typeface="NanumSquare" pitchFamily="34" charset="-122"/>
                 <a:cs typeface="NanumSquare" pitchFamily="34" charset="-120"/>
               </a:rPr>
-              <a:t>2026-10-08 · 개발 PC 1대에서 실행</a:t>
+              <a:t>2026-10-09 · 개발 PC 1대, LAN 구간 제외</a:t>
             </a:r>
             <a:endParaRPr lang="en-US" sz="1020" dirty="0"/>
           </a:p>
@@ -13636,7 +13648,7 @@
                 <a:ea typeface="NanumSquare" pitchFamily="34" charset="-122"/>
                 <a:cs typeface="NanumSquare" pitchFamily="34" charset="-120"/>
               </a:rPr>
-              <a:t>배포 가이드대로 시연 전 리허설</a:t>
+              <a:t>사전 점검·자동 리허설 스크립트 준비</a:t>
             </a:r>
             <a:endParaRPr lang="en-US" sz="1050" dirty="0"/>
           </a:p>
@@ -13653,7 +13665,7 @@
                 <a:ea typeface="NanumSquare" pitchFamily="34" charset="-122"/>
                 <a:cs typeface="NanumSquare" pitchFamily="34" charset="-120"/>
               </a:rPr>
-              <a:t>초기화·예시 채우기 스크립트 준비</a:t>
+              <a:t>시연 전에 PC 4대로 직접 리허설</a:t>
             </a:r>
             <a:endParaRPr lang="en-US" sz="1050" dirty="0"/>
           </a:p>

--- a/presentation/TaskCanvas_팀프로젝트_발표자료_14장.pptx
+++ b/presentation/TaskCanvas_팀프로젝트_발표자료_14장.pptx
@@ -917,7 +917,7 @@
           <a:p>
             <a:r>
               <a:rPr lang="ko-KR" dirty="0"/>
-              <a:t>수용 기준과 별도로 접속 출처 보안 점검과, 브라우저 네 개로 시연 순서를 그대로 돌리는 자동 리허설 12개 항목도 통과했습니다.</a:t>
+              <a:t>수용 기준과 별도로 접속 출처 보안 점검, 업로드 정리 운영 점검, 브라우저 네 개로 시연 순서를 그대로 돌리는 자동 리허설 12개 항목도 통과했습니다.</a:t>
             </a:r>
           </a:p>
           <a:p>
@@ -9320,7 +9320,7 @@
                 <a:ea typeface="NanumSquare" pitchFamily="34" charset="-122"/>
                 <a:cs typeface="NanumSquare" pitchFamily="34" charset="-120"/>
               </a:rPr>
-              <a:t>보안 점검 1 통과 · 접속 출처 제한</a:t>
+              <a:t>보안 점검 1 · 운영 점검 1 통과</a:t>
             </a:r>
             <a:endParaRPr lang="en-US" sz="1050" dirty="0"/>
           </a:p>
@@ -9398,7 +9398,7 @@
                 <a:ea typeface="NanumSquare" pitchFamily="34" charset="-122"/>
                 <a:cs typeface="NanumSquare" pitchFamily="34" charset="-120"/>
               </a:rPr>
-              <a:t>2026-10-09 · 개발 PC 1대, LAN 구간 제외</a:t>
+              <a:t>2026-10-10 · 개발 PC 1대, LAN 구간 제외</a:t>
             </a:r>
             <a:endParaRPr lang="en-US" sz="1020" dirty="0"/>
           </a:p>

--- a/presentation/TaskCanvas_팀프로젝트_발표자료_14장.pptx
+++ b/presentation/TaskCanvas_팀프로젝트_발표자료_14장.pptx
@@ -911,13 +911,13 @@
           <a:p>
             <a:r>
               <a:rPr lang="ko-KR" dirty="0"/>
-              <a:t>수용 기준 25개 중 21개는 자동 검사로, 3개는 브라우저에서 직접 확인해 통과했습니다.</a:t>
+              <a:t>수용 기준 26개 중 22개는 자동 검사로, 3개는 브라우저에서 직접 확인해 통과했습니다.</a:t>
             </a:r>
           </a:p>
           <a:p>
             <a:r>
               <a:rPr lang="ko-KR" dirty="0"/>
-              <a:t>수용 기준과 별도로 접속 출처 보안 점검, 업로드 정리 운영 점검, 브라우저 네 개로 시연 순서를 그대로 돌리는 자동 리허설 12개 항목도 통과했습니다.</a:t>
+              <a:t>수용 기준과 별도로 접속 출처 보안 점검, 업로드 정리 운영 점검, 브라우저 네 개로 시연 순서를 그대로 돌리는 자동 리허설 13개 항목도 통과했습니다.</a:t>
             </a:r>
           </a:p>
           <a:p>
@@ -1430,7 +1430,7 @@
           <a:p>
             <a:r>
               <a:rPr lang="ko-KR" dirty="0"/>
-              <a:t>P1인 메모, 공유 업무, 연결선, 다중 선택, 실행 취소, PNG 내보내기도 구현했습니다.</a:t>
+              <a:t>P1인 메모, 공유 업무와 작업실의 업무 현황판, 연결선, 다중 선택, 실행 취소, PNG 내보내기도 구현했습니다.</a:t>
             </a:r>
           </a:p>
         </p:txBody>
@@ -8573,7 +8573,7 @@
                 <a:ea typeface="NanumSquare" pitchFamily="34" charset="-122"/>
                 <a:cs typeface="NanumSquare" pitchFamily="34" charset="-120"/>
               </a:rPr>
-              <a:t>통과 조건 25개 — 개발 PC에서 확인한 결과와 아직 남은 학교 PC 검증</a:t>
+              <a:t>통과 조건 26개 — 개발 PC에서 확인한 결과와 아직 남은 학교 PC 검증</a:t>
             </a:r>
             <a:endParaRPr lang="en-US" sz="1360" dirty="0"/>
           </a:p>
@@ -8705,7 +8705,7 @@
                 <a:ea typeface="NanumSquare" pitchFamily="34" charset="-122"/>
                 <a:cs typeface="NanumSquare" pitchFamily="34" charset="-120"/>
               </a:rPr>
-              <a:t>21</a:t>
+              <a:t>22</a:t>
             </a:r>
             <a:endParaRPr lang="en-US" sz="2700" dirty="0"/>
           </a:p>
@@ -8783,7 +8783,7 @@
                 <a:ea typeface="NanumSquare" pitchFamily="34" charset="-122"/>
                 <a:cs typeface="NanumSquare" pitchFamily="34" charset="-120"/>
               </a:rPr>
-              <a:t>P0 13 · P1 8</a:t>
+              <a:t>P0 13 · P1 9</a:t>
             </a:r>
             <a:endParaRPr lang="en-US" sz="930" dirty="0"/>
           </a:p>
@@ -9359,7 +9359,7 @@
                 <a:ea typeface="NanumSquare" pitchFamily="34" charset="-122"/>
                 <a:cs typeface="NanumSquare" pitchFamily="34" charset="-120"/>
               </a:rPr>
-              <a:t>4인 자동 리허설 12 통과 · 브라우저 4개</a:t>
+              <a:t>4인 자동 리허설 13 통과 · 브라우저 4개</a:t>
             </a:r>
             <a:endParaRPr lang="en-US" sz="1050" dirty="0"/>
           </a:p>
@@ -11415,7 +11415,7 @@
                 <a:ea typeface="NanumSquare" pitchFamily="34" charset="-122"/>
                 <a:cs typeface="NanumSquare" pitchFamily="34" charset="-120"/>
               </a:rPr>
-              <a:t>P1 10개 통과</a:t>
+              <a:t>P1 11개 통과</a:t>
             </a:r>
             <a:endParaRPr lang="en-US" sz="1150" dirty="0"/>
           </a:p>
@@ -11454,7 +11454,7 @@
                 <a:ea typeface="NanumSquare" pitchFamily="34" charset="-122"/>
                 <a:cs typeface="NanumSquare" pitchFamily="34" charset="-120"/>
               </a:rPr>
-              <a:t>공유 업무 · 연결선 · 다중 선택 · 초대 코드 관리 · 크기 조절 · 메모 · 보드 관리</a:t>
+              <a:t>공유 업무 · 연결선 · 다중 선택 · 초대 코드 관리 · 크기 조절 · 메모 · 보드 관리 · 업무 현황판</a:t>
             </a:r>
             <a:endParaRPr lang="en-US" sz="1050" dirty="0"/>
           </a:p>
@@ -16953,7 +16953,7 @@
                 <a:ea typeface="NanumSquare" pitchFamily="34" charset="-122"/>
                 <a:cs typeface="NanumSquare" pitchFamily="34" charset="-120"/>
               </a:rPr>
-              <a:t>보드 목록·참여자·공유 업무 확인</a:t>
+              <a:t>보드 목록·업무 현황판·참여자 확인</a:t>
             </a:r>
             <a:endParaRPr lang="en-US" sz="1180" dirty="0"/>
           </a:p>

--- a/presentation/TaskCanvas_팀프로젝트_발표자료_14장.pptx
+++ b/presentation/TaskCanvas_팀프로젝트_발표자료_14장.pptx
@@ -911,7 +911,7 @@
           <a:p>
             <a:r>
               <a:rPr lang="ko-KR" dirty="0"/>
-              <a:t>수용 기준 26개 중 22개는 자동 검사로, 3개는 브라우저에서 직접 확인해 통과했습니다.</a:t>
+              <a:t>수용 기준 27개 중 23개는 자동 검사로, 3개는 브라우저에서 직접 확인해 통과했습니다.</a:t>
             </a:r>
           </a:p>
           <a:p>
@@ -1127,7 +1127,7 @@
           <a:p>
             <a:r>
               <a:rPr lang="ko-KR" dirty="0"/>
-              <a:t>회원가입 없이 이름과 초대 코드만으로 들어오는 게스트 구조입니다.</a:t>
+              <a:t>회원가입 없이 이름만 정해 작업실을 직접 만들거나, 이름과 초대 코드로 들어오는 게스트 구조입니다.</a:t>
             </a:r>
           </a:p>
           <a:p>
@@ -1220,7 +1220,7 @@
           <a:p>
             <a:r>
               <a:rPr lang="ko-KR" dirty="0"/>
-              <a:t>관리자가 역할별 초대 코드를 발급하고, 팀원은 이름과 코드로 입장합니다.</a:t>
+              <a:t>이름만 정해 작업실을 직접 만들면 그 사람이 관리자가 되어 역할별 초대 코드를 발급하고, 팀원은 이름과 코드로 입장합니다.</a:t>
             </a:r>
           </a:p>
           <a:p>
@@ -8573,7 +8573,7 @@
                 <a:ea typeface="NanumSquare" pitchFamily="34" charset="-122"/>
                 <a:cs typeface="NanumSquare" pitchFamily="34" charset="-120"/>
               </a:rPr>
-              <a:t>통과 조건 26개 — 개발 PC에서 확인한 결과와 아직 남은 학교 PC 검증</a:t>
+              <a:t>통과 조건 27개 — 개발 PC에서 확인한 결과와 아직 남은 학교 PC 검증</a:t>
             </a:r>
             <a:endParaRPr lang="en-US" sz="1360" dirty="0"/>
           </a:p>
@@ -8705,7 +8705,7 @@
                 <a:ea typeface="NanumSquare" pitchFamily="34" charset="-122"/>
                 <a:cs typeface="NanumSquare" pitchFamily="34" charset="-120"/>
               </a:rPr>
-              <a:t>22</a:t>
+              <a:t>23</a:t>
             </a:r>
             <a:endParaRPr lang="en-US" sz="2700" dirty="0"/>
           </a:p>
@@ -8783,7 +8783,7 @@
                 <a:ea typeface="NanumSquare" pitchFamily="34" charset="-122"/>
                 <a:cs typeface="NanumSquare" pitchFamily="34" charset="-120"/>
               </a:rPr>
-              <a:t>P0 13 · P1 9</a:t>
+              <a:t>P0 13 · P1 10</a:t>
             </a:r>
             <a:endParaRPr lang="en-US" sz="930" dirty="0"/>
           </a:p>
@@ -11415,7 +11415,7 @@
                 <a:ea typeface="NanumSquare" pitchFamily="34" charset="-122"/>
                 <a:cs typeface="NanumSquare" pitchFamily="34" charset="-120"/>
               </a:rPr>
-              <a:t>P1 11개 통과</a:t>
+              <a:t>P1 12개 통과</a:t>
             </a:r>
             <a:endParaRPr lang="en-US" sz="1150" dirty="0"/>
           </a:p>
@@ -11454,7 +11454,7 @@
                 <a:ea typeface="NanumSquare" pitchFamily="34" charset="-122"/>
                 <a:cs typeface="NanumSquare" pitchFamily="34" charset="-120"/>
               </a:rPr>
-              <a:t>공유 업무 · 연결선 · 다중 선택 · 초대 코드 관리 · 크기 조절 · 메모 · 보드 관리 · 업무 현황판</a:t>
+              <a:t>공유 업무 · 연결선 · 다중 선택 · 초대 코드 · 크기 조절 · 메모 · 보드 관리 · 현황판 · 작업실 생성</a:t>
             </a:r>
             <a:endParaRPr lang="en-US" sz="1050" dirty="0"/>
           </a:p>
@@ -14769,7 +14769,7 @@
                 <a:ea typeface="NanumSquare" pitchFamily="34" charset="-122"/>
                 <a:cs typeface="NanumSquare" pitchFamily="34" charset="-120"/>
               </a:rPr>
-              <a:t>4명 · 3주 · 학교 PC LAN — 가입 없이 초대 코드로 들어오는 공동 작업 공간</a:t>
+              <a:t>4명 · 3주 · 학교 PC LAN — 가입 없이 직접 만들거나 초대 코드로 들어오는 공동 작업 공간</a:t>
             </a:r>
             <a:endParaRPr lang="en-US" sz="1360" dirty="0"/>
           </a:p>
@@ -15387,7 +15387,7 @@
                 <a:ea typeface="NanumSquare" pitchFamily="34" charset="-122"/>
                 <a:cs typeface="NanumSquare" pitchFamily="34" charset="-120"/>
               </a:rPr>
-              <a:t>회원가입 없이 이름과 초대 코드로 게스트 입장</a:t>
+              <a:t>회원가입 없이 작업실을 만들거나 초대 코드로 입장</a:t>
             </a:r>
             <a:endParaRPr lang="en-US" sz="1200" dirty="0"/>
           </a:p>
@@ -16380,7 +16380,7 @@
                 <a:ea typeface="NanumSquare" pitchFamily="34" charset="-122"/>
                 <a:cs typeface="NanumSquare" pitchFamily="34" charset="-120"/>
               </a:rPr>
-              <a:t>초대 코드 → 게스트 입장 → 작업실 → 보드 편집 → 자동 저장</a:t>
+              <a:t>작업실 만들기 → 초대 → 게스트 입장 → 보드 편집 → 자동 저장</a:t>
             </a:r>
             <a:endParaRPr lang="en-US" sz="1360" dirty="0"/>
           </a:p>
@@ -16576,7 +16576,7 @@
                 <a:ea typeface="NanumSquare" pitchFamily="34" charset="-122"/>
                 <a:cs typeface="NanumSquare" pitchFamily="34" charset="-120"/>
               </a:rPr>
-              <a:t>초대 코드 발급</a:t>
+              <a:t>작업실 만들기</a:t>
             </a:r>
             <a:endParaRPr lang="en-US" sz="1600" dirty="0"/>
           </a:p>
@@ -16615,7 +16615,7 @@
                 <a:ea typeface="NanumSquare" pitchFamily="34" charset="-122"/>
                 <a:cs typeface="NanumSquare" pitchFamily="34" charset="-120"/>
               </a:rPr>
-              <a:t>관리자가 역할별 코드·링크 발급</a:t>
+              <a:t>직접 만들고 역할별 초대 코드 발급</a:t>
             </a:r>
             <a:endParaRPr lang="en-US" sz="1180" dirty="0"/>
           </a:p>

--- a/presentation/TaskCanvas_팀프로젝트_발표자료_14장.pptx
+++ b/presentation/TaskCanvas_팀프로젝트_발표자료_14장.pptx
@@ -911,13 +911,13 @@
           <a:p>
             <a:r>
               <a:rPr lang="ko-KR" dirty="0"/>
-              <a:t>수용 기준 27개 중 23개는 자동 검사로, 3개는 브라우저에서 직접 확인해 통과했습니다.</a:t>
+              <a:t>수용 기준 28개 중 24개는 자동 검사로, 3개는 브라우저에서 직접 확인해 통과했습니다.</a:t>
             </a:r>
           </a:p>
           <a:p>
             <a:r>
               <a:rPr lang="ko-KR" dirty="0"/>
-              <a:t>수용 기준과 별도로 접속 출처 보안 점검, 업로드 정리 운영 점검, 브라우저 네 개로 시연 순서를 그대로 돌리는 자동 리허설 13개 항목도 통과했습니다.</a:t>
+              <a:t>수용 기준과 별도로 접속 출처와 요청 제한 보안 점검, 업로드 정리 운영 점검, 브라우저 네 개로 시연 순서를 그대로 돌리는 자동 리허설 13개 항목도 통과했습니다.</a:t>
             </a:r>
           </a:p>
           <a:p>
@@ -8573,7 +8573,7 @@
                 <a:ea typeface="NanumSquare" pitchFamily="34" charset="-122"/>
                 <a:cs typeface="NanumSquare" pitchFamily="34" charset="-120"/>
               </a:rPr>
-              <a:t>통과 조건 27개 — 개발 PC에서 확인한 결과와 아직 남은 학교 PC 검증</a:t>
+              <a:t>통과 조건 28개 — 개발 PC에서 확인한 결과와 아직 남은 학교 PC 검증</a:t>
             </a:r>
             <a:endParaRPr lang="en-US" sz="1360" dirty="0"/>
           </a:p>
@@ -8705,7 +8705,7 @@
                 <a:ea typeface="NanumSquare" pitchFamily="34" charset="-122"/>
                 <a:cs typeface="NanumSquare" pitchFamily="34" charset="-120"/>
               </a:rPr>
-              <a:t>23</a:t>
+              <a:t>24</a:t>
             </a:r>
             <a:endParaRPr lang="en-US" sz="2700" dirty="0"/>
           </a:p>
@@ -8783,7 +8783,7 @@
                 <a:ea typeface="NanumSquare" pitchFamily="34" charset="-122"/>
                 <a:cs typeface="NanumSquare" pitchFamily="34" charset="-120"/>
               </a:rPr>
-              <a:t>P0 13 · P1 10</a:t>
+              <a:t>P0 13 · P1 11</a:t>
             </a:r>
             <a:endParaRPr lang="en-US" sz="930" dirty="0"/>
           </a:p>
@@ -9320,7 +9320,7 @@
                 <a:ea typeface="NanumSquare" pitchFamily="34" charset="-122"/>
                 <a:cs typeface="NanumSquare" pitchFamily="34" charset="-120"/>
               </a:rPr>
-              <a:t>보안 점검 1 · 운영 점검 1 통과</a:t>
+              <a:t>보안 점검 2 · 운영 점검 1 통과</a:t>
             </a:r>
             <a:endParaRPr lang="en-US" sz="1050" dirty="0"/>
           </a:p>
@@ -11415,7 +11415,7 @@
                 <a:ea typeface="NanumSquare" pitchFamily="34" charset="-122"/>
                 <a:cs typeface="NanumSquare" pitchFamily="34" charset="-120"/>
               </a:rPr>
-              <a:t>P1 12개 통과</a:t>
+              <a:t>P1 13개 통과</a:t>
             </a:r>
             <a:endParaRPr lang="en-US" sz="1150" dirty="0"/>
           </a:p>
@@ -11454,7 +11454,7 @@
                 <a:ea typeface="NanumSquare" pitchFamily="34" charset="-122"/>
                 <a:cs typeface="NanumSquare" pitchFamily="34" charset="-120"/>
               </a:rPr>
-              <a:t>공유 업무 · 연결선 · 다중 선택 · 초대 코드 · 크기 조절 · 메모 · 보드 관리 · 현황판 · 작업실 생성</a:t>
+              <a:t>공유 업무 · 연결선 · 다중 선택 · 초대 코드 · 크기 조절 · 메모 · 보드 관리 · 현황판</a:t>
             </a:r>
             <a:endParaRPr lang="en-US" sz="1050" dirty="0"/>
           </a:p>
@@ -11493,7 +11493,7 @@
                 <a:ea typeface="NanumSquare" pitchFamily="34" charset="-122"/>
                 <a:cs typeface="NanumSquare" pitchFamily="34" charset="-120"/>
               </a:rPr>
-              <a:t>실행 취소 · 복제 · PNG 내보내기는 브라우저에서 확인</a:t>
+              <a:t>작업실 생성 · 따라가기 포함, 실행 취소 · 복제 · PNG 내보내기는 브라우저에서 확인</a:t>
             </a:r>
             <a:endParaRPr lang="en-US" sz="1020" dirty="0"/>
           </a:p>

--- a/presentation/TaskCanvas_팀프로젝트_발표자료_14장.pptx
+++ b/presentation/TaskCanvas_팀프로젝트_발표자료_14장.pptx
@@ -911,7 +911,7 @@
           <a:p>
             <a:r>
               <a:rPr lang="ko-KR" dirty="0"/>
-              <a:t>수용 기준 28개 중 24개는 자동 검사로, 3개는 브라우저에서 직접 확인해 통과했습니다.</a:t>
+              <a:t>수용 기준 29개 중 25개는 자동 검사로, 3개는 브라우저에서 직접 확인해 통과했습니다.</a:t>
             </a:r>
           </a:p>
           <a:p>
@@ -8573,7 +8573,7 @@
                 <a:ea typeface="NanumSquare" pitchFamily="34" charset="-122"/>
                 <a:cs typeface="NanumSquare" pitchFamily="34" charset="-120"/>
               </a:rPr>
-              <a:t>통과 조건 28개 — 개발 PC에서 확인한 결과와 아직 남은 학교 PC 검증</a:t>
+              <a:t>통과 조건 29개 — 개발 PC에서 확인한 결과와 아직 남은 학교 PC 검증</a:t>
             </a:r>
             <a:endParaRPr lang="en-US" sz="1360" dirty="0"/>
           </a:p>
@@ -8705,7 +8705,7 @@
                 <a:ea typeface="NanumSquare" pitchFamily="34" charset="-122"/>
                 <a:cs typeface="NanumSquare" pitchFamily="34" charset="-120"/>
               </a:rPr>
-              <a:t>24</a:t>
+              <a:t>25</a:t>
             </a:r>
             <a:endParaRPr lang="en-US" sz="2700" dirty="0"/>
           </a:p>
@@ -8783,7 +8783,7 @@
                 <a:ea typeface="NanumSquare" pitchFamily="34" charset="-122"/>
                 <a:cs typeface="NanumSquare" pitchFamily="34" charset="-120"/>
               </a:rPr>
-              <a:t>P0 13 · P1 11</a:t>
+              <a:t>P0 13 · P1 12</a:t>
             </a:r>
             <a:endParaRPr lang="en-US" sz="930" dirty="0"/>
           </a:p>
@@ -11415,7 +11415,7 @@
                 <a:ea typeface="NanumSquare" pitchFamily="34" charset="-122"/>
                 <a:cs typeface="NanumSquare" pitchFamily="34" charset="-120"/>
               </a:rPr>
-              <a:t>P1 13개 통과</a:t>
+              <a:t>P1 14개 통과</a:t>
             </a:r>
             <a:endParaRPr lang="en-US" sz="1150" dirty="0"/>
           </a:p>
@@ -11493,7 +11493,7 @@
                 <a:ea typeface="NanumSquare" pitchFamily="34" charset="-122"/>
                 <a:cs typeface="NanumSquare" pitchFamily="34" charset="-120"/>
               </a:rPr>
-              <a:t>작업실 생성 · 따라가기 포함, 실행 취소 · 복제 · PNG 내보내기는 브라우저에서 확인</a:t>
+              <a:t>작업실 생성 · 따라가기 · 선택 표시 포함, 실행 취소 · 복제 · PNG 내보내기는 브라우저 확인</a:t>
             </a:r>
             <a:endParaRPr lang="en-US" sz="1020" dirty="0"/>
           </a:p>

--- a/presentation/TaskCanvas_팀프로젝트_발표자료_14장.pptx
+++ b/presentation/TaskCanvas_팀프로젝트_발표자료_14장.pptx
@@ -911,7 +911,7 @@
           <a:p>
             <a:r>
               <a:rPr lang="ko-KR" dirty="0"/>
-              <a:t>수용 기준 29개 중 25개는 자동 검사로, 3개는 브라우저에서 직접 확인해 통과했습니다.</a:t>
+              <a:t>수용 기준 30개 중 26개는 자동 검사로, 3개는 브라우저에서 직접 확인해 통과했습니다.</a:t>
             </a:r>
           </a:p>
           <a:p>
@@ -8573,7 +8573,7 @@
                 <a:ea typeface="NanumSquare" pitchFamily="34" charset="-122"/>
                 <a:cs typeface="NanumSquare" pitchFamily="34" charset="-120"/>
               </a:rPr>
-              <a:t>통과 조건 29개 — 개발 PC에서 확인한 결과와 아직 남은 학교 PC 검증</a:t>
+              <a:t>통과 조건 30개 — 개발 PC에서 확인한 결과와 아직 남은 학교 PC 검증</a:t>
             </a:r>
             <a:endParaRPr lang="en-US" sz="1360" dirty="0"/>
           </a:p>
@@ -8705,7 +8705,7 @@
                 <a:ea typeface="NanumSquare" pitchFamily="34" charset="-122"/>
                 <a:cs typeface="NanumSquare" pitchFamily="34" charset="-120"/>
               </a:rPr>
-              <a:t>25</a:t>
+              <a:t>26</a:t>
             </a:r>
             <a:endParaRPr lang="en-US" sz="2700" dirty="0"/>
           </a:p>
@@ -8783,7 +8783,7 @@
                 <a:ea typeface="NanumSquare" pitchFamily="34" charset="-122"/>
                 <a:cs typeface="NanumSquare" pitchFamily="34" charset="-120"/>
               </a:rPr>
-              <a:t>P0 13 · P1 12</a:t>
+              <a:t>P0 13 · P1 13</a:t>
             </a:r>
             <a:endParaRPr lang="en-US" sz="930" dirty="0"/>
           </a:p>
@@ -11415,7 +11415,7 @@
                 <a:ea typeface="NanumSquare" pitchFamily="34" charset="-122"/>
                 <a:cs typeface="NanumSquare" pitchFamily="34" charset="-120"/>
               </a:rPr>
-              <a:t>P1 14개 통과</a:t>
+              <a:t>P1 15개 통과</a:t>
             </a:r>
             <a:endParaRPr lang="en-US" sz="1150" dirty="0"/>
           </a:p>
@@ -11493,7 +11493,7 @@
                 <a:ea typeface="NanumSquare" pitchFamily="34" charset="-122"/>
                 <a:cs typeface="NanumSquare" pitchFamily="34" charset="-120"/>
               </a:rPr>
-              <a:t>작업실 생성 · 따라가기 · 선택 표시 포함, 실행 취소 · 복제 · PNG 내보내기는 브라우저 확인</a:t>
+              <a:t>작업실 생성 · 따라가기 · 선택 표시 · 체크리스트 포함, 실행 취소 · 복제 · PNG 저장은 브라우저 확인</a:t>
             </a:r>
             <a:endParaRPr lang="en-US" sz="1020" dirty="0"/>
           </a:p>

--- a/presentation/TaskCanvas_팀프로젝트_발표자료_14장.pptx
+++ b/presentation/TaskCanvas_팀프로젝트_발표자료_14장.pptx
@@ -911,13 +911,13 @@
           <a:p>
             <a:r>
               <a:rPr lang="ko-KR" dirty="0"/>
-              <a:t>수용 기준 30개 중 26개는 자동 검사로, 3개는 브라우저에서 직접 확인해 통과했습니다.</a:t>
+              <a:t>수용 기준 32개 중 28개는 자동 검사로, 3개는 브라우저에서 직접 확인해 통과했습니다.</a:t>
             </a:r>
           </a:p>
           <a:p>
             <a:r>
               <a:rPr lang="ko-KR" dirty="0"/>
-              <a:t>수용 기준과 별도로 접속 출처와 요청 제한 보안 점검, 업로드 정리 운영 점검, 브라우저 네 개로 시연 순서를 그대로 돌리는 자동 리허설 13개 항목도 통과했습니다.</a:t>
+              <a:t>수용 기준과 별도로 접속 출처와 요청 제한 보안 점검, 업로드 정리 운영 점검, 브라우저 네 개로 시연 순서를 그대로 돌리는 자동 리허설 14개 항목도 통과했습니다.</a:t>
             </a:r>
           </a:p>
           <a:p>
@@ -8573,7 +8573,7 @@
                 <a:ea typeface="NanumSquare" pitchFamily="34" charset="-122"/>
                 <a:cs typeface="NanumSquare" pitchFamily="34" charset="-120"/>
               </a:rPr>
-              <a:t>통과 조건 30개 — 개발 PC에서 확인한 결과와 아직 남은 학교 PC 검증</a:t>
+              <a:t>통과 조건 32개 — 개발 PC에서 확인한 결과와 아직 남은 학교 PC 검증</a:t>
             </a:r>
             <a:endParaRPr lang="en-US" sz="1360" dirty="0"/>
           </a:p>
@@ -8705,7 +8705,7 @@
                 <a:ea typeface="NanumSquare" pitchFamily="34" charset="-122"/>
                 <a:cs typeface="NanumSquare" pitchFamily="34" charset="-120"/>
               </a:rPr>
-              <a:t>26</a:t>
+              <a:t>28</a:t>
             </a:r>
             <a:endParaRPr lang="en-US" sz="2700" dirty="0"/>
           </a:p>
@@ -8783,7 +8783,7 @@
                 <a:ea typeface="NanumSquare" pitchFamily="34" charset="-122"/>
                 <a:cs typeface="NanumSquare" pitchFamily="34" charset="-120"/>
               </a:rPr>
-              <a:t>P0 13 · P1 13</a:t>
+              <a:t>P0 13 · P1 15</a:t>
             </a:r>
             <a:endParaRPr lang="en-US" sz="930" dirty="0"/>
           </a:p>
@@ -9359,7 +9359,7 @@
                 <a:ea typeface="NanumSquare" pitchFamily="34" charset="-122"/>
                 <a:cs typeface="NanumSquare" pitchFamily="34" charset="-120"/>
               </a:rPr>
-              <a:t>4인 자동 리허설 13 통과 · 브라우저 4개</a:t>
+              <a:t>4인 자동 리허설 14 통과 · 브라우저 4개</a:t>
             </a:r>
             <a:endParaRPr lang="en-US" sz="1050" dirty="0"/>
           </a:p>
@@ -11415,7 +11415,7 @@
                 <a:ea typeface="NanumSquare" pitchFamily="34" charset="-122"/>
                 <a:cs typeface="NanumSquare" pitchFamily="34" charset="-120"/>
               </a:rPr>
-              <a:t>P1 15개 통과</a:t>
+              <a:t>P1 17개 통과</a:t>
             </a:r>
             <a:endParaRPr lang="en-US" sz="1150" dirty="0"/>
           </a:p>
@@ -11493,7 +11493,7 @@
                 <a:ea typeface="NanumSquare" pitchFamily="34" charset="-122"/>
                 <a:cs typeface="NanumSquare" pitchFamily="34" charset="-120"/>
               </a:rPr>
-              <a:t>작업실 생성 · 따라가기 · 선택 표시 · 체크리스트 포함, 실행 취소 · 복제 · PNG 저장은 브라우저 확인</a:t>
+              <a:t>작업실 생성·삭제 · 따라가기 · 선택 표시 · 체크리스트 · 업무 삭제 포함, 브라우저 확인 3개는 별도</a:t>
             </a:r>
             <a:endParaRPr lang="en-US" sz="1020" dirty="0"/>
           </a:p>
